--- a/Fase 2/Evidencias Proyecto/Presentación Proyecto.pptx
+++ b/Fase 2/Evidencias Proyecto/Presentación Proyecto.pptx
@@ -273,7 +273,7 @@
       </p15:sldGuideLst>
     </p:ext>
     <p:ext uri="GoogleSlidesCustomDataVersion2">
-      <go:slidesCustomData xmlns="" xmlns:mc="http://schemas.openxmlformats.org/markup-compatibility/2006" xmlns:mv="urn:schemas-microsoft-com:mac:vml" xmlns:c="http://schemas.openxmlformats.org/drawingml/2006/chart" xmlns:dgm="http://schemas.openxmlformats.org/drawingml/2006/diagram" xmlns:o="urn:schemas-microsoft-com:office:office" xmlns:v="urn:schemas-microsoft-com:vml" xmlns:pvml="urn:schemas-microsoft-com:office:powerpoint" xmlns:com="http://schemas.openxmlformats.org/drawingml/2006/compatibility" xmlns:p14="http://schemas.microsoft.com/office/powerpoint/2010/main" xmlns:p15="http://schemas.microsoft.com/office/powerpoint/2012/main" xmlns:ahyp="http://schemas.microsoft.com/office/drawing/2018/hyperlinkcolor" xmlns:go="http://customooxmlschemas.google.com/" r:id="rId21" roundtripDataSignature="AMtx7mhLl6JfAoimCsWEm9GX5yCz9dp2bw=="/>
+      <go:slidesCustomData xmlns:go="http://customooxmlschemas.google.com/" xmlns:ahyp="http://schemas.microsoft.com/office/drawing/2018/hyperlinkcolor" xmlns:p15="http://schemas.microsoft.com/office/powerpoint/2012/main" xmlns:p14="http://schemas.microsoft.com/office/powerpoint/2010/main" xmlns:com="http://schemas.openxmlformats.org/drawingml/2006/compatibility" xmlns:pvml="urn:schemas-microsoft-com:office:powerpoint" xmlns:v="urn:schemas-microsoft-com:vml" xmlns:o="urn:schemas-microsoft-com:office:office" xmlns:dgm="http://schemas.openxmlformats.org/drawingml/2006/diagram" xmlns:c="http://schemas.openxmlformats.org/drawingml/2006/chart" xmlns:mv="urn:schemas-microsoft-com:mac:vml" xmlns:mc="http://schemas.openxmlformats.org/markup-compatibility/2006" xmlns="" r:id="rId21" roundtripDataSignature="AMtx7mhLl6JfAoimCsWEm9GX5yCz9dp2bw=="/>
     </p:ext>
   </p:extLst>
 </p:presentation>
@@ -30776,7 +30776,7 @@
         </p:nvSpPr>
         <p:spPr>
           <a:xfrm>
-            <a:off x="3995999" y="3565236"/>
+            <a:off x="3959999" y="2566246"/>
             <a:ext cx="7549200" cy="277200"/>
           </a:xfrm>
           <a:prstGeom prst="rect">
@@ -30850,7 +30850,7 @@
         </p:nvSpPr>
         <p:spPr>
           <a:xfrm>
-            <a:off x="3959999" y="1130230"/>
+            <a:off x="3959999" y="370651"/>
             <a:ext cx="7549200" cy="769441"/>
           </a:xfrm>
           <a:prstGeom prst="rect">
@@ -30904,33 +30904,6 @@
           </a:p>
         </p:txBody>
       </p:sp>
-      <p:pic>
-        <p:nvPicPr>
-          <p:cNvPr id="193" name="Google Shape;193;p4" descr="empresas.png"/>
-          <p:cNvPicPr preferRelativeResize="0"/>
-          <p:nvPr/>
-        </p:nvPicPr>
-        <p:blipFill rotWithShape="1">
-          <a:blip r:embed="rId15">
-            <a:alphaModFix/>
-          </a:blip>
-          <a:srcRect/>
-          <a:stretch/>
-        </p:blipFill>
-        <p:spPr>
-          <a:xfrm>
-            <a:off x="8784000" y="3816000"/>
-            <a:ext cx="3024000" cy="2376000"/>
-          </a:xfrm>
-          <a:prstGeom prst="rect">
-            <a:avLst/>
-          </a:prstGeom>
-          <a:noFill/>
-          <a:ln>
-            <a:noFill/>
-          </a:ln>
-        </p:spPr>
-      </p:pic>
       <p:sp>
         <p:nvSpPr>
           <p:cNvPr id="194" name="Google Shape;194;p4"/>
@@ -30939,7 +30912,7 @@
         </p:nvSpPr>
         <p:spPr>
           <a:xfrm>
-            <a:off x="3959999" y="2016000"/>
+            <a:off x="3959999" y="1140092"/>
             <a:ext cx="7549200" cy="1296000"/>
           </a:xfrm>
           <a:prstGeom prst="roundRect">
@@ -30995,7 +30968,7 @@
         </p:nvSpPr>
         <p:spPr>
           <a:xfrm>
-            <a:off x="3959999" y="2037600"/>
+            <a:off x="3959999" y="1161692"/>
             <a:ext cx="64800" cy="1252800"/>
           </a:xfrm>
           <a:prstGeom prst="rect">
@@ -31043,7 +31016,7 @@
         </p:nvSpPr>
         <p:spPr>
           <a:xfrm>
-            <a:off x="4265999" y="2232000"/>
+            <a:off x="4265999" y="1356092"/>
             <a:ext cx="7009200" cy="900000"/>
           </a:xfrm>
           <a:prstGeom prst="roundRect">
@@ -31098,8 +31071,8 @@
         </p:nvSpPr>
         <p:spPr>
           <a:xfrm>
-            <a:off x="3959999" y="3914700"/>
-            <a:ext cx="5256000" cy="2232000"/>
+            <a:off x="3885111" y="2909879"/>
+            <a:ext cx="7770976" cy="3408121"/>
           </a:xfrm>
           <a:prstGeom prst="roundRect">
             <a:avLst>
@@ -31117,20 +31090,15 @@
           </a:bodyPr>
           <a:lstStyle/>
           <a:p>
-            <a:pPr marL="0" marR="0" lvl="0" indent="0" algn="l" rtl="0">
+            <a:pPr marL="342900" lvl="0" indent="-342900">
               <a:lnSpc>
                 <a:spcPct val="115000"/>
               </a:lnSpc>
-              <a:spcBef>
-                <a:spcPts val="0"/>
-              </a:spcBef>
-              <a:spcAft>
-                <a:spcPts val="0"/>
-              </a:spcAft>
-              <a:buNone/>
+              <a:buFont typeface="Arial" panose="020B0604020202020204" pitchFamily="34" charset="0"/>
+              <a:buChar char="•"/>
             </a:pPr>
             <a:r>
-              <a:rPr lang="en-US" sz="1939" b="0" i="0" u="none" strike="noStrike" cap="none" dirty="0">
+              <a:rPr lang="es-CL" sz="1800" dirty="0">
                 <a:solidFill>
                   <a:srgbClr val="14303A"/>
                 </a:solidFill>
@@ -31139,10 +31107,19 @@
                 <a:cs typeface="Calibri"/>
                 <a:sym typeface="Calibri"/>
               </a:rPr>
-              <a:t>•  </a:t>
+              <a:t>Diseñar un módulo de administración que permita a cada empresa gestionar de forma autónoma sus documentos, preguntas frecuentes y agentes.</a:t>
             </a:r>
+          </a:p>
+          <a:p>
+            <a:pPr marL="342900" lvl="0" indent="-342900">
+              <a:lnSpc>
+                <a:spcPct val="115000"/>
+              </a:lnSpc>
+              <a:buFont typeface="Arial" panose="020B0604020202020204" pitchFamily="34" charset="0"/>
+              <a:buChar char="•"/>
+            </a:pPr>
             <a:r>
-              <a:rPr lang="en-US" sz="1939" b="0" i="0" u="none" strike="noStrike" cap="none" dirty="0" err="1">
+              <a:rPr lang="es-CL" sz="1800" dirty="0">
                 <a:solidFill>
                   <a:srgbClr val="14303A"/>
                 </a:solidFill>
@@ -31151,10 +31128,19 @@
                 <a:cs typeface="Calibri"/>
                 <a:sym typeface="Calibri"/>
               </a:rPr>
-              <a:t>Administrar</a:t>
+              <a:t>Implementar un proceso de ingesta y vectorización del conocimiento de cada empresa para alimentar el motor de respuestas.</a:t>
             </a:r>
+          </a:p>
+          <a:p>
+            <a:pPr marL="342900" lvl="0" indent="-342900">
+              <a:lnSpc>
+                <a:spcPct val="115000"/>
+              </a:lnSpc>
+              <a:buFont typeface="Arial" panose="020B0604020202020204" pitchFamily="34" charset="0"/>
+              <a:buChar char="•"/>
+            </a:pPr>
             <a:r>
-              <a:rPr lang="en-US" sz="1939" b="0" i="0" u="none" strike="noStrike" cap="none" dirty="0">
+              <a:rPr lang="es-CL" sz="1800" dirty="0">
                 <a:solidFill>
                   <a:srgbClr val="14303A"/>
                 </a:solidFill>
@@ -31163,10 +31149,19 @@
                 <a:cs typeface="Calibri"/>
                 <a:sym typeface="Calibri"/>
               </a:rPr>
-              <a:t> </a:t>
+              <a:t>Desarrollar un motor conversacional basado en RAG, con dos agentes especializados (comercial y técnico), que responda las consultas de los usuarios con el conocimiento de cada empresa.</a:t>
             </a:r>
+          </a:p>
+          <a:p>
+            <a:pPr marL="342900" lvl="0" indent="-342900">
+              <a:lnSpc>
+                <a:spcPct val="115000"/>
+              </a:lnSpc>
+              <a:buFont typeface="Arial" panose="020B0604020202020204" pitchFamily="34" charset="0"/>
+              <a:buChar char="•"/>
+            </a:pPr>
             <a:r>
-              <a:rPr lang="en-US" sz="1939" b="0" i="0" u="none" strike="noStrike" cap="none" dirty="0" err="1">
+              <a:rPr lang="es-CL" sz="1800" dirty="0">
                 <a:solidFill>
                   <a:srgbClr val="14303A"/>
                 </a:solidFill>
@@ -31175,10 +31170,19 @@
                 <a:cs typeface="Calibri"/>
                 <a:sym typeface="Calibri"/>
               </a:rPr>
-              <a:t>documentos</a:t>
+              <a:t>Establecer un mecanismo de derivación a un agente humano o generación de ticket cuando el sistema no logre resolver la consulta.</a:t>
             </a:r>
+          </a:p>
+          <a:p>
+            <a:pPr marL="342900" lvl="0" indent="-342900">
+              <a:lnSpc>
+                <a:spcPct val="115000"/>
+              </a:lnSpc>
+              <a:buFont typeface="Arial" panose="020B0604020202020204" pitchFamily="34" charset="0"/>
+              <a:buChar char="•"/>
+            </a:pPr>
             <a:r>
-              <a:rPr lang="en-US" sz="1939" b="0" i="0" u="none" strike="noStrike" cap="none" dirty="0">
+              <a:rPr lang="es-CL" sz="1800" dirty="0">
                 <a:solidFill>
                   <a:srgbClr val="14303A"/>
                 </a:solidFill>
@@ -31187,405 +31191,17 @@
                 <a:cs typeface="Calibri"/>
                 <a:sym typeface="Calibri"/>
               </a:rPr>
-              <a:t>, FAQ y </a:t>
+              <a:t>Implementar un sistema de métricas que permita medir la actividad y el consumo de cada empresa dentro de la plataforma.</a:t>
             </a:r>
-            <a:r>
-              <a:rPr lang="en-US" sz="1939" b="0" i="0" u="none" strike="noStrike" cap="none" dirty="0" err="1">
-                <a:solidFill>
-                  <a:srgbClr val="14303A"/>
-                </a:solidFill>
-                <a:latin typeface="Calibri"/>
-                <a:ea typeface="Calibri"/>
-                <a:cs typeface="Calibri"/>
-                <a:sym typeface="Calibri"/>
-              </a:rPr>
-              <a:t>agentes</a:t>
-            </a:r>
-            <a:r>
-              <a:rPr lang="en-US" sz="1939" b="0" i="0" u="none" strike="noStrike" cap="none" dirty="0">
-                <a:solidFill>
-                  <a:srgbClr val="14303A"/>
-                </a:solidFill>
-                <a:latin typeface="Calibri"/>
-                <a:ea typeface="Calibri"/>
-                <a:cs typeface="Calibri"/>
-                <a:sym typeface="Calibri"/>
-              </a:rPr>
-              <a:t>.</a:t>
-            </a:r>
-            <a:endParaRPr dirty="0"/>
-          </a:p>
-          <a:p>
-            <a:pPr marL="0" marR="0" lvl="0" indent="0" algn="l" rtl="0">
-              <a:lnSpc>
-                <a:spcPct val="115000"/>
-              </a:lnSpc>
-              <a:spcBef>
-                <a:spcPts val="1160"/>
-              </a:spcBef>
-              <a:spcAft>
-                <a:spcPts val="0"/>
-              </a:spcAft>
-              <a:buNone/>
-            </a:pPr>
-            <a:r>
-              <a:rPr lang="en-US" sz="1939" b="0" i="0" u="none" strike="noStrike" cap="none" dirty="0">
-                <a:solidFill>
-                  <a:srgbClr val="14303A"/>
-                </a:solidFill>
-                <a:latin typeface="Calibri"/>
-                <a:ea typeface="Calibri"/>
-                <a:cs typeface="Calibri"/>
-                <a:sym typeface="Calibri"/>
-              </a:rPr>
-              <a:t>•  </a:t>
-            </a:r>
-            <a:r>
-              <a:rPr lang="en-US" sz="1939" b="0" i="0" u="none" strike="noStrike" cap="none" dirty="0" err="1">
-                <a:solidFill>
-                  <a:srgbClr val="14303A"/>
-                </a:solidFill>
-                <a:latin typeface="Calibri"/>
-                <a:ea typeface="Calibri"/>
-                <a:cs typeface="Calibri"/>
-                <a:sym typeface="Calibri"/>
-              </a:rPr>
-              <a:t>Ingerir</a:t>
-            </a:r>
-            <a:r>
-              <a:rPr lang="en-US" sz="1939" b="0" i="0" u="none" strike="noStrike" cap="none" dirty="0">
-                <a:solidFill>
-                  <a:srgbClr val="14303A"/>
-                </a:solidFill>
-                <a:latin typeface="Calibri"/>
-                <a:ea typeface="Calibri"/>
-                <a:cs typeface="Calibri"/>
-                <a:sym typeface="Calibri"/>
-              </a:rPr>
-              <a:t> y </a:t>
-            </a:r>
-            <a:r>
-              <a:rPr lang="en-US" sz="1939" b="0" i="0" u="none" strike="noStrike" cap="none" dirty="0" err="1">
-                <a:solidFill>
-                  <a:srgbClr val="14303A"/>
-                </a:solidFill>
-                <a:latin typeface="Calibri"/>
-                <a:ea typeface="Calibri"/>
-                <a:cs typeface="Calibri"/>
-                <a:sym typeface="Calibri"/>
-              </a:rPr>
-              <a:t>vectorizar</a:t>
-            </a:r>
-            <a:r>
-              <a:rPr lang="en-US" sz="1939" b="0" i="0" u="none" strike="noStrike" cap="none" dirty="0">
-                <a:solidFill>
-                  <a:srgbClr val="14303A"/>
-                </a:solidFill>
-                <a:latin typeface="Calibri"/>
-                <a:ea typeface="Calibri"/>
-                <a:cs typeface="Calibri"/>
-                <a:sym typeface="Calibri"/>
-              </a:rPr>
-              <a:t> el conocimiento.</a:t>
-            </a:r>
-            <a:endParaRPr dirty="0"/>
-          </a:p>
-          <a:p>
-            <a:pPr marL="0" marR="0" lvl="0" indent="0" algn="l" rtl="0">
-              <a:lnSpc>
-                <a:spcPct val="115000"/>
-              </a:lnSpc>
-              <a:spcBef>
-                <a:spcPts val="1160"/>
-              </a:spcBef>
-              <a:spcAft>
-                <a:spcPts val="0"/>
-              </a:spcAft>
-              <a:buNone/>
-            </a:pPr>
-            <a:r>
-              <a:rPr lang="en-US" sz="1939" b="0" i="0" u="none" strike="noStrike" cap="none" dirty="0">
-                <a:solidFill>
-                  <a:srgbClr val="14303A"/>
-                </a:solidFill>
-                <a:latin typeface="Calibri"/>
-                <a:ea typeface="Calibri"/>
-                <a:cs typeface="Calibri"/>
-                <a:sym typeface="Calibri"/>
-              </a:rPr>
-              <a:t>•  Responder con un motor RAG y dos </a:t>
-            </a:r>
-            <a:r>
-              <a:rPr lang="en-US" sz="1939" b="0" i="0" u="none" strike="noStrike" cap="none" dirty="0" err="1">
-                <a:solidFill>
-                  <a:srgbClr val="14303A"/>
-                </a:solidFill>
-                <a:latin typeface="Calibri"/>
-                <a:ea typeface="Calibri"/>
-                <a:cs typeface="Calibri"/>
-                <a:sym typeface="Calibri"/>
-              </a:rPr>
-              <a:t>agentes</a:t>
-            </a:r>
-            <a:r>
-              <a:rPr lang="en-US" sz="1939" b="0" i="0" u="none" strike="noStrike" cap="none" dirty="0">
-                <a:solidFill>
-                  <a:srgbClr val="14303A"/>
-                </a:solidFill>
-                <a:latin typeface="Calibri"/>
-                <a:ea typeface="Calibri"/>
-                <a:cs typeface="Calibri"/>
-                <a:sym typeface="Calibri"/>
-              </a:rPr>
-              <a:t>.</a:t>
-            </a:r>
-            <a:endParaRPr dirty="0"/>
-          </a:p>
-          <a:p>
-            <a:pPr marL="0" marR="0" lvl="0" indent="0" algn="l" rtl="0">
-              <a:lnSpc>
-                <a:spcPct val="115000"/>
-              </a:lnSpc>
-              <a:spcBef>
-                <a:spcPts val="1160"/>
-              </a:spcBef>
-              <a:spcAft>
-                <a:spcPts val="0"/>
-              </a:spcAft>
-              <a:buNone/>
-            </a:pPr>
-            <a:r>
-              <a:rPr lang="en-US" sz="1939" b="0" i="0" u="none" strike="noStrike" cap="none" dirty="0">
-                <a:solidFill>
-                  <a:srgbClr val="14303A"/>
-                </a:solidFill>
-                <a:latin typeface="Calibri"/>
-                <a:ea typeface="Calibri"/>
-                <a:cs typeface="Calibri"/>
-                <a:sym typeface="Calibri"/>
-              </a:rPr>
-              <a:t>•  </a:t>
-            </a:r>
-            <a:r>
-              <a:rPr lang="en-US" sz="1939" b="0" i="0" u="none" strike="noStrike" cap="none" dirty="0" err="1">
-                <a:solidFill>
-                  <a:srgbClr val="14303A"/>
-                </a:solidFill>
-                <a:latin typeface="Calibri"/>
-                <a:ea typeface="Calibri"/>
-                <a:cs typeface="Calibri"/>
-                <a:sym typeface="Calibri"/>
-              </a:rPr>
-              <a:t>Derivar</a:t>
-            </a:r>
-            <a:r>
-              <a:rPr lang="en-US" sz="1939" b="0" i="0" u="none" strike="noStrike" cap="none" dirty="0">
-                <a:solidFill>
-                  <a:srgbClr val="14303A"/>
-                </a:solidFill>
-                <a:latin typeface="Calibri"/>
-                <a:ea typeface="Calibri"/>
-                <a:cs typeface="Calibri"/>
-                <a:sym typeface="Calibri"/>
-              </a:rPr>
-              <a:t> a un </a:t>
-            </a:r>
-            <a:r>
-              <a:rPr lang="en-US" sz="1939" b="0" i="0" u="none" strike="noStrike" cap="none" dirty="0" err="1">
-                <a:solidFill>
-                  <a:srgbClr val="14303A"/>
-                </a:solidFill>
-                <a:latin typeface="Calibri"/>
-                <a:ea typeface="Calibri"/>
-                <a:cs typeface="Calibri"/>
-                <a:sym typeface="Calibri"/>
-              </a:rPr>
-              <a:t>humano</a:t>
-            </a:r>
-            <a:r>
-              <a:rPr lang="en-US" sz="1939" b="0" i="0" u="none" strike="noStrike" cap="none" dirty="0">
-                <a:solidFill>
-                  <a:srgbClr val="14303A"/>
-                </a:solidFill>
-                <a:latin typeface="Calibri"/>
-                <a:ea typeface="Calibri"/>
-                <a:cs typeface="Calibri"/>
-                <a:sym typeface="Calibri"/>
-              </a:rPr>
-              <a:t>, o </a:t>
-            </a:r>
-            <a:r>
-              <a:rPr lang="en-US" sz="1939" b="0" i="0" u="none" strike="noStrike" cap="none" dirty="0" err="1">
-                <a:solidFill>
-                  <a:srgbClr val="14303A"/>
-                </a:solidFill>
-                <a:latin typeface="Calibri"/>
-                <a:ea typeface="Calibri"/>
-                <a:cs typeface="Calibri"/>
-                <a:sym typeface="Calibri"/>
-              </a:rPr>
-              <a:t>dejar</a:t>
-            </a:r>
-            <a:r>
-              <a:rPr lang="en-US" sz="1939" b="0" i="0" u="none" strike="noStrike" cap="none" dirty="0">
-                <a:solidFill>
-                  <a:srgbClr val="14303A"/>
-                </a:solidFill>
-                <a:latin typeface="Calibri"/>
-                <a:ea typeface="Calibri"/>
-                <a:cs typeface="Calibri"/>
-                <a:sym typeface="Calibri"/>
-              </a:rPr>
-              <a:t> ticket.</a:t>
-            </a:r>
-            <a:endParaRPr dirty="0"/>
-          </a:p>
-          <a:p>
-            <a:pPr marL="0" marR="0" lvl="0" indent="0" algn="l" rtl="0">
-              <a:lnSpc>
-                <a:spcPct val="115000"/>
-              </a:lnSpc>
-              <a:spcBef>
-                <a:spcPts val="1160"/>
-              </a:spcBef>
-              <a:spcAft>
-                <a:spcPts val="0"/>
-              </a:spcAft>
-              <a:buNone/>
-            </a:pPr>
-            <a:r>
-              <a:rPr lang="en-US" sz="1939" b="0" i="0" u="none" strike="noStrike" cap="none" dirty="0">
-                <a:solidFill>
-                  <a:srgbClr val="14303A"/>
-                </a:solidFill>
-                <a:latin typeface="Calibri"/>
-                <a:ea typeface="Calibri"/>
-                <a:cs typeface="Calibri"/>
-                <a:sym typeface="Calibri"/>
-              </a:rPr>
-              <a:t>•  </a:t>
-            </a:r>
-            <a:r>
-              <a:rPr lang="en-US" sz="1939" b="0" i="0" u="none" strike="noStrike" cap="none" dirty="0" err="1">
-                <a:solidFill>
-                  <a:srgbClr val="14303A"/>
-                </a:solidFill>
-                <a:latin typeface="Calibri"/>
-                <a:ea typeface="Calibri"/>
-                <a:cs typeface="Calibri"/>
-                <a:sym typeface="Calibri"/>
-              </a:rPr>
-              <a:t>Medir</a:t>
-            </a:r>
-            <a:r>
-              <a:rPr lang="en-US" sz="1939" b="0" i="0" u="none" strike="noStrike" cap="none" dirty="0">
-                <a:solidFill>
-                  <a:srgbClr val="14303A"/>
-                </a:solidFill>
-                <a:latin typeface="Calibri"/>
-                <a:ea typeface="Calibri"/>
-                <a:cs typeface="Calibri"/>
-                <a:sym typeface="Calibri"/>
-              </a:rPr>
-              <a:t> </a:t>
-            </a:r>
-            <a:r>
-              <a:rPr lang="en-US" sz="1939" b="0" i="0" u="none" strike="noStrike" cap="none" dirty="0" err="1">
-                <a:solidFill>
-                  <a:srgbClr val="14303A"/>
-                </a:solidFill>
-                <a:latin typeface="Calibri"/>
-                <a:ea typeface="Calibri"/>
-                <a:cs typeface="Calibri"/>
-                <a:sym typeface="Calibri"/>
-              </a:rPr>
-              <a:t>actividad</a:t>
-            </a:r>
-            <a:r>
-              <a:rPr lang="en-US" sz="1939" b="0" i="0" u="none" strike="noStrike" cap="none" dirty="0">
-                <a:solidFill>
-                  <a:srgbClr val="14303A"/>
-                </a:solidFill>
-                <a:latin typeface="Calibri"/>
-                <a:ea typeface="Calibri"/>
-                <a:cs typeface="Calibri"/>
-                <a:sym typeface="Calibri"/>
-              </a:rPr>
-              <a:t> y </a:t>
-            </a:r>
-            <a:r>
-              <a:rPr lang="en-US" sz="1939" b="0" i="0" u="none" strike="noStrike" cap="none" dirty="0" err="1">
-                <a:solidFill>
-                  <a:srgbClr val="14303A"/>
-                </a:solidFill>
-                <a:latin typeface="Calibri"/>
-                <a:ea typeface="Calibri"/>
-                <a:cs typeface="Calibri"/>
-                <a:sym typeface="Calibri"/>
-              </a:rPr>
-              <a:t>consumo</a:t>
-            </a:r>
-            <a:r>
-              <a:rPr lang="en-US" sz="1939" b="0" i="0" u="none" strike="noStrike" cap="none" dirty="0">
-                <a:solidFill>
-                  <a:srgbClr val="14303A"/>
-                </a:solidFill>
-                <a:latin typeface="Calibri"/>
-                <a:ea typeface="Calibri"/>
-                <a:cs typeface="Calibri"/>
-                <a:sym typeface="Calibri"/>
-              </a:rPr>
-              <a:t> </a:t>
-            </a:r>
-            <a:r>
-              <a:rPr lang="en-US" sz="1939" b="0" i="0" u="none" strike="noStrike" cap="none" dirty="0" err="1">
-                <a:solidFill>
-                  <a:srgbClr val="14303A"/>
-                </a:solidFill>
-                <a:latin typeface="Calibri"/>
-                <a:ea typeface="Calibri"/>
-                <a:cs typeface="Calibri"/>
-                <a:sym typeface="Calibri"/>
-              </a:rPr>
-              <a:t>por</a:t>
-            </a:r>
-            <a:r>
-              <a:rPr lang="en-US" sz="1939" b="0" i="0" u="none" strike="noStrike" cap="none" dirty="0">
-                <a:solidFill>
-                  <a:srgbClr val="14303A"/>
-                </a:solidFill>
-                <a:latin typeface="Calibri"/>
-                <a:ea typeface="Calibri"/>
-                <a:cs typeface="Calibri"/>
-                <a:sym typeface="Calibri"/>
-              </a:rPr>
-              <a:t> </a:t>
-            </a:r>
-            <a:r>
-              <a:rPr lang="en-US" sz="1939" b="0" i="0" u="none" strike="noStrike" cap="none" dirty="0" err="1">
-                <a:solidFill>
-                  <a:srgbClr val="14303A"/>
-                </a:solidFill>
-                <a:latin typeface="Calibri"/>
-                <a:ea typeface="Calibri"/>
-                <a:cs typeface="Calibri"/>
-                <a:sym typeface="Calibri"/>
-              </a:rPr>
-              <a:t>empresa</a:t>
-            </a:r>
-            <a:r>
-              <a:rPr lang="en-US" sz="1939" b="0" i="0" u="none" strike="noStrike" cap="none" dirty="0">
-                <a:solidFill>
-                  <a:srgbClr val="14303A"/>
-                </a:solidFill>
-                <a:latin typeface="Calibri"/>
-                <a:ea typeface="Calibri"/>
-                <a:cs typeface="Calibri"/>
-                <a:sym typeface="Calibri"/>
-              </a:rPr>
-              <a:t>.</a:t>
-            </a:r>
-            <a:endParaRPr dirty="0"/>
+            <a:endParaRPr lang="en-US" sz="1800" b="0" i="0" u="none" strike="noStrike" cap="none" dirty="0">
+              <a:solidFill>
+                <a:srgbClr val="14303A"/>
+              </a:solidFill>
+              <a:latin typeface="Calibri"/>
+              <a:ea typeface="Calibri"/>
+              <a:cs typeface="Calibri"/>
+              <a:sym typeface="Calibri"/>
+            </a:endParaRPr>
           </a:p>
         </p:txBody>
       </p:sp>
